--- a/2026_Б_ПІ_ПЗПІ-22-4_Герцев_В_А.pptx
+++ b/2026_Б_ПІ_ПЗПІ-22-4_Герцев_В_А.pptx
@@ -293,7 +293,7 @@
 <file path=ppt/revisionInfo.xml><?xml version="1.0" encoding="utf-8"?>
 <p1510:revInfo xmlns:a="http://schemas.openxmlformats.org/drawingml/2006/main" xmlns:r="http://schemas.openxmlformats.org/officeDocument/2006/relationships" xmlns:p1510="http://schemas.microsoft.com/office/powerpoint/2015/10/main">
   <p1510:revLst>
-    <p1510:client id="{3FECE4FE-1029-4EE8-ACAF-2FA6E109E04A}" v="5" dt="2026-07-06T08:12:17.060"/>
+    <p1510:client id="{3FECE4FE-1029-4EE8-ACAF-2FA6E109E04A}" v="14" dt="2026-07-09T14:28:33.809"/>
   </p1510:revLst>
 </p1510:revInfo>
 </file>
@@ -303,18 +303,26 @@
   <pc:docChgLst>
     <pc:chgData name="В'ячеслав Герцев" userId="25cf14d751791959" providerId="LiveId" clId="{E51DC668-10DB-45DA-B37A-8B5C11F6928A}"/>
     <pc:docChg chg="undo custSel modSld modMainMaster">
-      <pc:chgData name="В'ячеслав Герцев" userId="25cf14d751791959" providerId="LiveId" clId="{E51DC668-10DB-45DA-B37A-8B5C11F6928A}" dt="2026-07-06T08:12:50.348" v="58" actId="27636"/>
+      <pc:chgData name="В'ячеслав Герцев" userId="25cf14d751791959" providerId="LiveId" clId="{E51DC668-10DB-45DA-B37A-8B5C11F6928A}" dt="2026-07-09T14:28:35.513" v="106" actId="20577"/>
       <pc:docMkLst>
         <pc:docMk/>
       </pc:docMkLst>
       <pc:sldChg chg="modSp mod">
-        <pc:chgData name="В'ячеслав Герцев" userId="25cf14d751791959" providerId="LiveId" clId="{E51DC668-10DB-45DA-B37A-8B5C11F6928A}" dt="2026-06-27T08:58:03.260" v="0" actId="20577"/>
+        <pc:chgData name="В'ячеслав Герцев" userId="25cf14d751791959" providerId="LiveId" clId="{E51DC668-10DB-45DA-B37A-8B5C11F6928A}" dt="2026-07-09T14:05:21.604" v="69" actId="14100"/>
         <pc:sldMkLst>
           <pc:docMk/>
           <pc:sldMk cId="0" sldId="256"/>
         </pc:sldMkLst>
         <pc:spChg chg="mod">
-          <ac:chgData name="В'ячеслав Герцев" userId="25cf14d751791959" providerId="LiveId" clId="{E51DC668-10DB-45DA-B37A-8B5C11F6928A}" dt="2026-06-27T08:58:03.260" v="0" actId="20577"/>
+          <ac:chgData name="В'ячеслав Герцев" userId="25cf14d751791959" providerId="LiveId" clId="{E51DC668-10DB-45DA-B37A-8B5C11F6928A}" dt="2026-07-09T12:28:37.208" v="67" actId="14100"/>
+          <ac:spMkLst>
+            <pc:docMk/>
+            <pc:sldMk cId="0" sldId="256"/>
+            <ac:spMk id="62" creationId="{00000000-0000-0000-0000-000000000000}"/>
+          </ac:spMkLst>
+        </pc:spChg>
+        <pc:spChg chg="mod">
+          <ac:chgData name="В'ячеслав Герцев" userId="25cf14d751791959" providerId="LiveId" clId="{E51DC668-10DB-45DA-B37A-8B5C11F6928A}" dt="2026-07-09T14:05:21.604" v="69" actId="14100"/>
           <ac:spMkLst>
             <pc:docMk/>
             <pc:sldMk cId="0" sldId="256"/>
@@ -323,17 +331,55 @@
         </pc:spChg>
       </pc:sldChg>
       <pc:sldChg chg="modSp mod">
-        <pc:chgData name="В'ячеслав Герцев" userId="25cf14d751791959" providerId="LiveId" clId="{E51DC668-10DB-45DA-B37A-8B5C11F6928A}" dt="2026-07-03T18:19:52.646" v="6" actId="1076"/>
+        <pc:chgData name="В'ячеслав Герцев" userId="25cf14d751791959" providerId="LiveId" clId="{E51DC668-10DB-45DA-B37A-8B5C11F6928A}" dt="2026-07-09T14:21:38.381" v="83" actId="20577"/>
         <pc:sldMkLst>
           <pc:docMk/>
           <pc:sldMk cId="0" sldId="257"/>
         </pc:sldMkLst>
         <pc:spChg chg="mod">
-          <ac:chgData name="В'ячеслав Герцев" userId="25cf14d751791959" providerId="LiveId" clId="{E51DC668-10DB-45DA-B37A-8B5C11F6928A}" dt="2026-07-03T18:19:52.646" v="6" actId="1076"/>
+          <ac:chgData name="В'ячеслав Герцев" userId="25cf14d751791959" providerId="LiveId" clId="{E51DC668-10DB-45DA-B37A-8B5C11F6928A}" dt="2026-07-09T14:21:38.381" v="83" actId="20577"/>
           <ac:spMkLst>
             <pc:docMk/>
             <pc:sldMk cId="0" sldId="257"/>
             <ac:spMk id="72" creationId="{00000000-0000-0000-0000-000000000000}"/>
+          </ac:spMkLst>
+        </pc:spChg>
+      </pc:sldChg>
+      <pc:sldChg chg="modSp mod">
+        <pc:chgData name="В'ячеслав Герцев" userId="25cf14d751791959" providerId="LiveId" clId="{E51DC668-10DB-45DA-B37A-8B5C11F6928A}" dt="2026-07-09T11:38:01.856" v="60" actId="1076"/>
+        <pc:sldMkLst>
+          <pc:docMk/>
+          <pc:sldMk cId="0" sldId="258"/>
+        </pc:sldMkLst>
+        <pc:spChg chg="mod">
+          <ac:chgData name="В'ячеслав Герцев" userId="25cf14d751791959" providerId="LiveId" clId="{E51DC668-10DB-45DA-B37A-8B5C11F6928A}" dt="2026-07-09T11:38:01.856" v="60" actId="1076"/>
+          <ac:spMkLst>
+            <pc:docMk/>
+            <pc:sldMk cId="0" sldId="258"/>
+            <ac:spMk id="80" creationId="{00000000-0000-0000-0000-000000000000}"/>
+          </ac:spMkLst>
+        </pc:spChg>
+      </pc:sldChg>
+      <pc:sldChg chg="modSp mod">
+        <pc:chgData name="В'ячеслав Герцев" userId="25cf14d751791959" providerId="LiveId" clId="{E51DC668-10DB-45DA-B37A-8B5C11F6928A}" dt="2026-07-09T14:21:56.789" v="85" actId="20577"/>
+        <pc:sldMkLst>
+          <pc:docMk/>
+          <pc:sldMk cId="0" sldId="259"/>
+        </pc:sldMkLst>
+        <pc:spChg chg="mod">
+          <ac:chgData name="В'ячеслав Герцев" userId="25cf14d751791959" providerId="LiveId" clId="{E51DC668-10DB-45DA-B37A-8B5C11F6928A}" dt="2026-07-09T14:21:56.789" v="85" actId="20577"/>
+          <ac:spMkLst>
+            <pc:docMk/>
+            <pc:sldMk cId="0" sldId="259"/>
+            <ac:spMk id="89" creationId="{00000000-0000-0000-0000-000000000000}"/>
+          </ac:spMkLst>
+        </pc:spChg>
+        <pc:spChg chg="mod">
+          <ac:chgData name="В'ячеслав Герцев" userId="25cf14d751791959" providerId="LiveId" clId="{E51DC668-10DB-45DA-B37A-8B5C11F6928A}" dt="2026-07-09T14:21:52.128" v="84" actId="20577"/>
+          <ac:spMkLst>
+            <pc:docMk/>
+            <pc:sldMk cId="0" sldId="259"/>
+            <ac:spMk id="92" creationId="{00000000-0000-0000-0000-000000000000}"/>
           </ac:spMkLst>
         </pc:spChg>
       </pc:sldChg>
@@ -368,6 +414,29 @@
         </pc:spChg>
       </pc:sldChg>
       <pc:sldChg chg="modSp mod">
+        <pc:chgData name="В'ячеслав Герцев" userId="25cf14d751791959" providerId="LiveId" clId="{E51DC668-10DB-45DA-B37A-8B5C11F6928A}" dt="2026-07-09T14:28:35.513" v="106" actId="20577"/>
+        <pc:sldMkLst>
+          <pc:docMk/>
+          <pc:sldMk cId="0" sldId="262"/>
+        </pc:sldMkLst>
+        <pc:spChg chg="mod">
+          <ac:chgData name="В'ячеслав Герцев" userId="25cf14d751791959" providerId="LiveId" clId="{E51DC668-10DB-45DA-B37A-8B5C11F6928A}" dt="2026-07-09T14:28:33.809" v="104"/>
+          <ac:spMkLst>
+            <pc:docMk/>
+            <pc:sldMk cId="0" sldId="262"/>
+            <ac:spMk id="113" creationId="{00000000-0000-0000-0000-000000000000}"/>
+          </ac:spMkLst>
+        </pc:spChg>
+        <pc:spChg chg="mod">
+          <ac:chgData name="В'ячеслав Герцев" userId="25cf14d751791959" providerId="LiveId" clId="{E51DC668-10DB-45DA-B37A-8B5C11F6928A}" dt="2026-07-09T14:28:35.513" v="106" actId="20577"/>
+          <ac:spMkLst>
+            <pc:docMk/>
+            <pc:sldMk cId="0" sldId="262"/>
+            <ac:spMk id="114" creationId="{00000000-0000-0000-0000-000000000000}"/>
+          </ac:spMkLst>
+        </pc:spChg>
+      </pc:sldChg>
+      <pc:sldChg chg="modSp mod">
         <pc:chgData name="В'ячеслав Герцев" userId="25cf14d751791959" providerId="LiveId" clId="{E51DC668-10DB-45DA-B37A-8B5C11F6928A}" dt="2026-07-03T18:46:25.406" v="21" actId="20577"/>
         <pc:sldMkLst>
           <pc:docMk/>
@@ -383,13 +452,13 @@
         </pc:spChg>
       </pc:sldChg>
       <pc:sldChg chg="modSp mod">
-        <pc:chgData name="В'ячеслав Герцев" userId="25cf14d751791959" providerId="LiveId" clId="{E51DC668-10DB-45DA-B37A-8B5C11F6928A}" dt="2026-07-06T08:12:50.348" v="58" actId="27636"/>
+        <pc:chgData name="В'ячеслав Герцев" userId="25cf14d751791959" providerId="LiveId" clId="{E51DC668-10DB-45DA-B37A-8B5C11F6928A}" dt="2026-07-09T14:22:28.854" v="103" actId="20577"/>
         <pc:sldMkLst>
           <pc:docMk/>
           <pc:sldMk cId="0" sldId="267"/>
         </pc:sldMkLst>
         <pc:spChg chg="mod">
-          <ac:chgData name="В'ячеслав Герцев" userId="25cf14d751791959" providerId="LiveId" clId="{E51DC668-10DB-45DA-B37A-8B5C11F6928A}" dt="2026-07-06T08:12:50.348" v="58" actId="27636"/>
+          <ac:chgData name="В'ячеслав Герцев" userId="25cf14d751791959" providerId="LiveId" clId="{E51DC668-10DB-45DA-B37A-8B5C11F6928A}" dt="2026-07-09T14:22:28.854" v="103" actId="20577"/>
           <ac:spMkLst>
             <pc:docMk/>
             <pc:sldMk cId="0" sldId="267"/>
@@ -10981,7 +11050,7 @@
         <p:spPr>
           <a:xfrm>
             <a:off x="2805449" y="821299"/>
-            <a:ext cx="5944103" cy="908889"/>
+            <a:ext cx="5944103" cy="1104216"/>
           </a:xfrm>
           <a:prstGeom prst="rect">
             <a:avLst/>
@@ -11011,79 +11080,157 @@
               <a:buNone/>
             </a:pPr>
             <a:r>
-              <a:rPr lang="uk-UA" sz="2400" dirty="0">
+              <a:rPr lang="ru-RU" sz="2400" dirty="0" err="1">
                 <a:latin typeface="Times New Roman"/>
                 <a:ea typeface="Times New Roman"/>
                 <a:cs typeface="Times New Roman"/>
                 <a:sym typeface="Times New Roman"/>
               </a:rPr>
-              <a:t>2D </a:t>
-            </a:r>
-            <a:r>
-              <a:rPr lang="uk-UA" sz="2400" dirty="0" err="1">
+              <a:t>Ігрове</a:t>
+            </a:r>
+            <a:r>
+              <a:rPr lang="ru-RU" sz="2400" dirty="0">
                 <a:latin typeface="Times New Roman"/>
                 <a:ea typeface="Times New Roman"/>
                 <a:cs typeface="Times New Roman"/>
                 <a:sym typeface="Times New Roman"/>
               </a:rPr>
-              <a:t>Roguelike-платформер</a:t>
-            </a:r>
-            <a:r>
-              <a:rPr lang="uk-UA" sz="2400" dirty="0">
+              <a:t> </a:t>
+            </a:r>
+            <a:r>
+              <a:rPr lang="ru-RU" sz="2400" dirty="0" err="1">
                 <a:latin typeface="Times New Roman"/>
                 <a:ea typeface="Times New Roman"/>
                 <a:cs typeface="Times New Roman"/>
                 <a:sym typeface="Times New Roman"/>
               </a:rPr>
-              <a:t> на рушії </a:t>
-            </a:r>
-            <a:r>
-              <a:rPr lang="uk-UA" sz="2400" dirty="0" err="1">
+              <a:t>програмне</a:t>
+            </a:r>
+            <a:r>
+              <a:rPr lang="ru-RU" sz="2400" dirty="0">
                 <a:latin typeface="Times New Roman"/>
                 <a:ea typeface="Times New Roman"/>
                 <a:cs typeface="Times New Roman"/>
                 <a:sym typeface="Times New Roman"/>
               </a:rPr>
-              <a:t>Unity</a:t>
-            </a:r>
-            <a:r>
-              <a:rPr lang="uk-UA" sz="2400" dirty="0">
+              <a:t> </a:t>
+            </a:r>
+            <a:r>
+              <a:rPr lang="ru-RU" sz="2400" dirty="0" err="1">
                 <a:latin typeface="Times New Roman"/>
                 <a:ea typeface="Times New Roman"/>
                 <a:cs typeface="Times New Roman"/>
                 <a:sym typeface="Times New Roman"/>
               </a:rPr>
-              <a:t>.</a:t>
-            </a:r>
-            <a:endParaRPr sz="2400" dirty="0">
-              <a:latin typeface="Times New Roman"/>
-              <a:ea typeface="Times New Roman"/>
-              <a:cs typeface="Times New Roman"/>
-              <a:sym typeface="Times New Roman"/>
-            </a:endParaRPr>
-          </a:p>
-          <a:p>
-            <a:pPr marL="0" lvl="0" indent="0" algn="l" rtl="0">
-              <a:lnSpc>
-                <a:spcPct val="100000"/>
-              </a:lnSpc>
-              <a:spcBef>
-                <a:spcPts val="0"/>
-              </a:spcBef>
-              <a:spcAft>
-                <a:spcPts val="0"/>
-              </a:spcAft>
-              <a:buSzPts val="4200"/>
-              <a:buNone/>
-            </a:pPr>
-            <a:r>
-              <a:rPr lang="uk-UA" sz="2400" dirty="0">
+              <a:t>забезпечення</a:t>
+            </a:r>
+            <a:r>
+              <a:rPr lang="ru-RU" sz="2400" dirty="0">
                 <a:latin typeface="Times New Roman"/>
                 <a:ea typeface="Times New Roman"/>
                 <a:cs typeface="Times New Roman"/>
                 <a:sym typeface="Times New Roman"/>
               </a:rPr>
-              <a:t>Дизайн та балансування ігрового процесу</a:t>
+              <a:t> в </a:t>
+            </a:r>
+            <a:r>
+              <a:rPr lang="ru-RU" sz="2400" dirty="0" err="1">
+                <a:latin typeface="Times New Roman"/>
+                <a:ea typeface="Times New Roman"/>
+                <a:cs typeface="Times New Roman"/>
+                <a:sym typeface="Times New Roman"/>
+              </a:rPr>
+              <a:t>жанрі</a:t>
+            </a:r>
+            <a:r>
+              <a:rPr lang="ru-RU" sz="2400" dirty="0">
+                <a:latin typeface="Times New Roman"/>
+                <a:ea typeface="Times New Roman"/>
+                <a:cs typeface="Times New Roman"/>
+                <a:sym typeface="Times New Roman"/>
+              </a:rPr>
+              <a:t> 2D платформеру на </a:t>
+            </a:r>
+            <a:r>
+              <a:rPr lang="ru-RU" sz="2400" dirty="0" err="1">
+                <a:latin typeface="Times New Roman"/>
+                <a:ea typeface="Times New Roman"/>
+                <a:cs typeface="Times New Roman"/>
+                <a:sym typeface="Times New Roman"/>
+              </a:rPr>
+              <a:t>рушії</a:t>
+            </a:r>
+            <a:r>
+              <a:rPr lang="ru-RU" sz="2400" dirty="0">
+                <a:latin typeface="Times New Roman"/>
+                <a:ea typeface="Times New Roman"/>
+                <a:cs typeface="Times New Roman"/>
+                <a:sym typeface="Times New Roman"/>
+              </a:rPr>
+              <a:t> </a:t>
+            </a:r>
+            <a:r>
+              <a:rPr lang="ru-RU" sz="2400" dirty="0" err="1">
+                <a:latin typeface="Times New Roman"/>
+                <a:ea typeface="Times New Roman"/>
+                <a:cs typeface="Times New Roman"/>
+                <a:sym typeface="Times New Roman"/>
+              </a:rPr>
+              <a:t>Unity</a:t>
+            </a:r>
+            <a:r>
+              <a:rPr lang="ru-RU" sz="2400" dirty="0">
+                <a:latin typeface="Times New Roman"/>
+                <a:ea typeface="Times New Roman"/>
+                <a:cs typeface="Times New Roman"/>
+                <a:sym typeface="Times New Roman"/>
+              </a:rPr>
+              <a:t>. Дизайн та </a:t>
+            </a:r>
+            <a:r>
+              <a:rPr lang="ru-RU" sz="2400" dirty="0" err="1">
+                <a:latin typeface="Times New Roman"/>
+                <a:ea typeface="Times New Roman"/>
+                <a:cs typeface="Times New Roman"/>
+                <a:sym typeface="Times New Roman"/>
+              </a:rPr>
+              <a:t>балансування</a:t>
+            </a:r>
+            <a:r>
+              <a:rPr lang="ru-RU" sz="2400" dirty="0">
+                <a:latin typeface="Times New Roman"/>
+                <a:ea typeface="Times New Roman"/>
+                <a:cs typeface="Times New Roman"/>
+                <a:sym typeface="Times New Roman"/>
+              </a:rPr>
+              <a:t> </a:t>
+            </a:r>
+            <a:r>
+              <a:rPr lang="ru-RU" sz="2400" dirty="0" err="1">
+                <a:latin typeface="Times New Roman"/>
+                <a:ea typeface="Times New Roman"/>
+                <a:cs typeface="Times New Roman"/>
+                <a:sym typeface="Times New Roman"/>
+              </a:rPr>
+              <a:t>ігрового</a:t>
+            </a:r>
+            <a:r>
+              <a:rPr lang="ru-RU" sz="2400" dirty="0">
+                <a:latin typeface="Times New Roman"/>
+                <a:ea typeface="Times New Roman"/>
+                <a:cs typeface="Times New Roman"/>
+                <a:sym typeface="Times New Roman"/>
+              </a:rPr>
+              <a:t> </a:t>
+            </a:r>
+            <a:r>
+              <a:rPr lang="ru-RU" sz="2400" dirty="0" err="1">
+                <a:latin typeface="Times New Roman"/>
+                <a:ea typeface="Times New Roman"/>
+                <a:cs typeface="Times New Roman"/>
+                <a:sym typeface="Times New Roman"/>
+              </a:rPr>
+              <a:t>процесу</a:t>
             </a:r>
             <a:endParaRPr sz="2400" dirty="0">
               <a:latin typeface="Times New Roman"/>
@@ -11107,7 +11254,7 @@
         <p:spPr>
           <a:xfrm>
             <a:off x="1743471" y="2486417"/>
-            <a:ext cx="4881447" cy="2657083"/>
+            <a:ext cx="4899376" cy="2657083"/>
           </a:xfrm>
           <a:prstGeom prst="rect">
             <a:avLst/>
@@ -11153,10 +11300,16 @@
               <a:buNone/>
             </a:pPr>
             <a:r>
-              <a:rPr lang="uk-UA" sz="2000" dirty="0"/>
+              <a:rPr lang="uk-UA" sz="2000" dirty="0">
+                <a:latin typeface="Times New Roman" panose="02020603050405020304" pitchFamily="18" charset="0"/>
+                <a:cs typeface="Times New Roman" panose="02020603050405020304" pitchFamily="18" charset="0"/>
+              </a:rPr>
               <a:t>Герцев В’ячеслав Андрійович, ПЗПІ-22-4</a:t>
             </a:r>
-            <a:endParaRPr sz="2000" dirty="0"/>
+            <a:endParaRPr sz="2000" dirty="0">
+              <a:latin typeface="Times New Roman" panose="02020603050405020304" pitchFamily="18" charset="0"/>
+              <a:cs typeface="Times New Roman" panose="02020603050405020304" pitchFamily="18" charset="0"/>
+            </a:endParaRPr>
           </a:p>
           <a:p>
             <a:pPr marL="0" lvl="0" indent="0" algn="l" rtl="0">
@@ -12062,6 +12215,24 @@
                 <a:cs typeface="Times New Roman"/>
                 <a:sym typeface="Times New Roman"/>
               </a:rPr>
+              <a:t>платформер</a:t>
+            </a:r>
+            <a:r>
+              <a:rPr lang="uk-UA" sz="1800">
+                <a:latin typeface="Times New Roman"/>
+                <a:ea typeface="Times New Roman"/>
+                <a:cs typeface="Times New Roman"/>
+                <a:sym typeface="Times New Roman"/>
+              </a:rPr>
+              <a:t> /</a:t>
+            </a:r>
+            <a:r>
+              <a:rPr lang="uk-UA" sz="1800" dirty="0" err="1">
+                <a:latin typeface="Times New Roman"/>
+                <a:ea typeface="Times New Roman"/>
+                <a:cs typeface="Times New Roman"/>
+                <a:sym typeface="Times New Roman"/>
+              </a:rPr>
               <a:t>roguelike</a:t>
             </a:r>
             <a:r>
@@ -12665,7 +12836,7 @@
                 <a:cs typeface="Times New Roman"/>
                 <a:sym typeface="Times New Roman"/>
               </a:rPr>
-              <a:t>roguelike-платформеру</a:t>
+              <a:t>платформеру</a:t>
             </a:r>
             <a:r>
               <a:rPr lang="uk-UA" sz="1600" dirty="0">
@@ -12784,52 +12955,6 @@
                 <a:sym typeface="Times New Roman"/>
               </a:rPr>
               <a:t>тетроміно</a:t>
-            </a:r>
-            <a:endParaRPr sz="1600" dirty="0">
-              <a:latin typeface="Times New Roman"/>
-              <a:ea typeface="Times New Roman"/>
-              <a:cs typeface="Times New Roman"/>
-              <a:sym typeface="Times New Roman"/>
-            </a:endParaRPr>
-          </a:p>
-          <a:p>
-            <a:pPr marL="457200" lvl="0" indent="-330200" algn="l" rtl="0">
-              <a:spcBef>
-                <a:spcPts val="0"/>
-              </a:spcBef>
-              <a:spcAft>
-                <a:spcPts val="0"/>
-              </a:spcAft>
-              <a:buSzPts val="1600"/>
-              <a:buFont typeface="Times New Roman"/>
-              <a:buChar char="-"/>
-            </a:pPr>
-            <a:r>
-              <a:rPr lang="uk-UA" sz="1600" dirty="0" err="1">
-                <a:latin typeface="Times New Roman"/>
-                <a:ea typeface="Times New Roman"/>
-                <a:cs typeface="Times New Roman"/>
-                <a:sym typeface="Times New Roman"/>
-              </a:rPr>
-              <a:t>Roguelike</a:t>
-            </a:r>
-            <a:r>
-              <a:rPr lang="uk-UA" sz="1600" dirty="0">
-                <a:latin typeface="Times New Roman"/>
-                <a:ea typeface="Times New Roman"/>
-                <a:cs typeface="Times New Roman"/>
-                <a:sym typeface="Times New Roman"/>
-              </a:rPr>
-              <a:t>-складова: процедурні рівні, вороги, висока </a:t>
-            </a:r>
-            <a:r>
-              <a:rPr lang="uk-UA" sz="1600" dirty="0" err="1">
-                <a:latin typeface="Times New Roman"/>
-                <a:ea typeface="Times New Roman"/>
-                <a:cs typeface="Times New Roman"/>
-                <a:sym typeface="Times New Roman"/>
-              </a:rPr>
-              <a:t>реграбельність</a:t>
             </a:r>
             <a:endParaRPr sz="1600" dirty="0">
               <a:latin typeface="Times New Roman"/>
@@ -12949,7 +13074,7 @@
                 <a:cs typeface="Times New Roman"/>
                 <a:sym typeface="Times New Roman"/>
               </a:rPr>
-              <a:t>Roguelike</a:t>
+              <a:t>Платформер</a:t>
             </a:r>
             <a:r>
               <a:rPr lang="uk-UA" sz="1600" dirty="0">
@@ -14859,7 +14984,7 @@
               <a:buNone/>
             </a:pPr>
             <a:r>
-              <a:rPr lang="uk-UA" sz="1700" b="1">
+              <a:rPr lang="uk-UA" sz="1700" b="1" dirty="0">
                 <a:latin typeface="Times New Roman"/>
                 <a:ea typeface="Times New Roman"/>
                 <a:cs typeface="Times New Roman"/>
@@ -14868,15 +14993,69 @@
               <a:t>Проблема:  </a:t>
             </a:r>
             <a:r>
-              <a:rPr lang="uk-UA" sz="1700">
+              <a:rPr lang="uk-UA" sz="1700" dirty="0">
                 <a:latin typeface="Times New Roman"/>
                 <a:ea typeface="Times New Roman"/>
                 <a:cs typeface="Times New Roman"/>
                 <a:sym typeface="Times New Roman"/>
               </a:rPr>
-              <a:t>більшість мобільних і десктопних roguelike-платформерів або перевантажені UI, або обмежуються типовою механікою «біг + стрибок + удар», без оригінальних просторових механік.</a:t>
-            </a:r>
-            <a:endParaRPr sz="1700"/>
+              <a:t>більшість мобільних і </a:t>
+            </a:r>
+            <a:r>
+              <a:rPr lang="uk-UA" sz="1700" dirty="0" err="1">
+                <a:latin typeface="Times New Roman"/>
+                <a:ea typeface="Times New Roman"/>
+                <a:cs typeface="Times New Roman"/>
+                <a:sym typeface="Times New Roman"/>
+              </a:rPr>
+              <a:t>десктопних</a:t>
+            </a:r>
+            <a:r>
+              <a:rPr lang="uk-UA" sz="1700" dirty="0">
+                <a:latin typeface="Times New Roman"/>
+                <a:ea typeface="Times New Roman"/>
+                <a:cs typeface="Times New Roman"/>
+                <a:sym typeface="Times New Roman"/>
+              </a:rPr>
+              <a:t> </a:t>
+            </a:r>
+            <a:r>
+              <a:rPr lang="uk-UA" sz="1700" dirty="0" err="1">
+                <a:latin typeface="Times New Roman"/>
+                <a:ea typeface="Times New Roman"/>
+                <a:cs typeface="Times New Roman"/>
+                <a:sym typeface="Times New Roman"/>
+              </a:rPr>
+              <a:t>платформерів</a:t>
+            </a:r>
+            <a:r>
+              <a:rPr lang="uk-UA" sz="1700" dirty="0">
+                <a:latin typeface="Times New Roman"/>
+                <a:ea typeface="Times New Roman"/>
+                <a:cs typeface="Times New Roman"/>
+                <a:sym typeface="Times New Roman"/>
+              </a:rPr>
+              <a:t> або перевантажені UI, або обмежуються типовою </a:t>
+            </a:r>
+            <a:r>
+              <a:rPr lang="uk-UA" sz="1700" dirty="0" err="1">
+                <a:latin typeface="Times New Roman"/>
+                <a:ea typeface="Times New Roman"/>
+                <a:cs typeface="Times New Roman"/>
+                <a:sym typeface="Times New Roman"/>
+              </a:rPr>
+              <a:t>механікою</a:t>
+            </a:r>
+            <a:r>
+              <a:rPr lang="uk-UA" sz="1700" dirty="0">
+                <a:latin typeface="Times New Roman"/>
+                <a:ea typeface="Times New Roman"/>
+                <a:cs typeface="Times New Roman"/>
+                <a:sym typeface="Times New Roman"/>
+              </a:rPr>
+              <a:t> «біг + стрибок + удар», без оригінальних просторових механік.</a:t>
+            </a:r>
+            <a:endParaRPr sz="1700" dirty="0"/>
           </a:p>
         </p:txBody>
       </p:sp>
@@ -15011,7 +15190,7 @@
               <a:buNone/>
             </a:pPr>
             <a:r>
-              <a:rPr lang="uk-UA" sz="1700">
+              <a:rPr lang="uk-UA" sz="1700" dirty="0">
                 <a:latin typeface="Times New Roman"/>
                 <a:ea typeface="Times New Roman"/>
                 <a:cs typeface="Times New Roman"/>
@@ -15019,7 +15198,7 @@
               </a:rPr>
               <a:t>Задача:</a:t>
             </a:r>
-            <a:endParaRPr sz="1700">
+            <a:endParaRPr sz="1700" dirty="0">
               <a:latin typeface="Times New Roman"/>
               <a:ea typeface="Times New Roman"/>
               <a:cs typeface="Times New Roman"/>
@@ -15045,7 +15224,7 @@
               <a:buChar char="-"/>
             </a:pPr>
             <a:r>
-              <a:rPr lang="uk-UA" sz="1700">
+              <a:rPr lang="uk-UA" sz="1700" dirty="0">
                 <a:solidFill>
                   <a:srgbClr val="2A2018"/>
                 </a:solidFill>
@@ -15054,9 +15233,33 @@
                 <a:cs typeface="Times New Roman"/>
                 <a:sym typeface="Times New Roman"/>
               </a:rPr>
-              <a:t>Проаналізувати жанр roguelike-платформерів та ключові аналоги</a:t>
-            </a:r>
-            <a:endParaRPr sz="1700">
+              <a:t>Проаналізувати жанр </a:t>
+            </a:r>
+            <a:r>
+              <a:rPr lang="uk-UA" sz="1700" dirty="0" err="1">
+                <a:solidFill>
+                  <a:srgbClr val="2A2018"/>
+                </a:solidFill>
+                <a:latin typeface="Times New Roman"/>
+                <a:ea typeface="Times New Roman"/>
+                <a:cs typeface="Times New Roman"/>
+                <a:sym typeface="Times New Roman"/>
+              </a:rPr>
+              <a:t>платформерів</a:t>
+            </a:r>
+            <a:r>
+              <a:rPr lang="uk-UA" sz="1700" dirty="0">
+                <a:solidFill>
+                  <a:srgbClr val="2A2018"/>
+                </a:solidFill>
+                <a:latin typeface="Times New Roman"/>
+                <a:ea typeface="Times New Roman"/>
+                <a:cs typeface="Times New Roman"/>
+                <a:sym typeface="Times New Roman"/>
+              </a:rPr>
+              <a:t> та ключові аналоги</a:t>
+            </a:r>
+            <a:endParaRPr sz="1700" dirty="0">
               <a:solidFill>
                 <a:srgbClr val="2A2018"/>
               </a:solidFill>
@@ -15085,7 +15288,7 @@
               <a:buChar char="-"/>
             </a:pPr>
             <a:r>
-              <a:rPr lang="uk-UA" sz="1700">
+              <a:rPr lang="uk-UA" sz="1700" dirty="0">
                 <a:solidFill>
                   <a:srgbClr val="2A2018"/>
                 </a:solidFill>
@@ -15096,7 +15299,7 @@
               </a:rPr>
               <a:t>Розробити документ ігрового дизайну (GDD)</a:t>
             </a:r>
-            <a:endParaRPr sz="1700">
+            <a:endParaRPr sz="1700" dirty="0">
               <a:solidFill>
                 <a:srgbClr val="2A2018"/>
               </a:solidFill>
@@ -15125,7 +15328,7 @@
               <a:buChar char="-"/>
             </a:pPr>
             <a:r>
-              <a:rPr lang="uk-UA" sz="1700">
+              <a:rPr lang="uk-UA" sz="1700" dirty="0">
                 <a:solidFill>
                   <a:srgbClr val="2A2018"/>
                 </a:solidFill>
@@ -15136,7 +15339,7 @@
               </a:rPr>
               <a:t>Спроєктувати механіку магічних цеглин та її інтеграцію з іншими системами</a:t>
             </a:r>
-            <a:endParaRPr sz="1700">
+            <a:endParaRPr sz="1700" dirty="0">
               <a:solidFill>
                 <a:srgbClr val="2A2018"/>
               </a:solidFill>
@@ -15165,7 +15368,7 @@
               <a:buChar char="-"/>
             </a:pPr>
             <a:r>
-              <a:rPr lang="uk-UA" sz="1700">
+              <a:rPr lang="uk-UA" sz="1700" dirty="0">
                 <a:solidFill>
                   <a:srgbClr val="2A2018"/>
                 </a:solidFill>
@@ -15174,9 +15377,21 @@
                 <a:cs typeface="Times New Roman"/>
                 <a:sym typeface="Times New Roman"/>
               </a:rPr>
-              <a:t>Розробити систему ворогів з різними поведінковими патернами</a:t>
-            </a:r>
-            <a:endParaRPr sz="1700">
+              <a:t>Розробити систему ворогів з різними поведінковими </a:t>
+            </a:r>
+            <a:r>
+              <a:rPr lang="uk-UA" sz="1700" dirty="0" err="1">
+                <a:solidFill>
+                  <a:srgbClr val="2A2018"/>
+                </a:solidFill>
+                <a:latin typeface="Times New Roman"/>
+                <a:ea typeface="Times New Roman"/>
+                <a:cs typeface="Times New Roman"/>
+                <a:sym typeface="Times New Roman"/>
+              </a:rPr>
+              <a:t>патернами</a:t>
+            </a:r>
+            <a:endParaRPr sz="1700" dirty="0">
               <a:solidFill>
                 <a:srgbClr val="2A2018"/>
               </a:solidFill>
@@ -15205,7 +15420,7 @@
               <a:buChar char="-"/>
             </a:pPr>
             <a:r>
-              <a:rPr lang="uk-UA" sz="1700">
+              <a:rPr lang="uk-UA" sz="1700" dirty="0">
                 <a:solidFill>
                   <a:srgbClr val="2A2018"/>
                 </a:solidFill>
@@ -15216,7 +15431,7 @@
               </a:rPr>
               <a:t>Визначити принципи балансування складності</a:t>
             </a:r>
-            <a:endParaRPr sz="1700">
+            <a:endParaRPr sz="1700" dirty="0">
               <a:solidFill>
                 <a:srgbClr val="2A2018"/>
               </a:solidFill>
@@ -15245,7 +15460,7 @@
               <a:buChar char="-"/>
             </a:pPr>
             <a:r>
-              <a:rPr lang="uk-UA" sz="1700">
+              <a:rPr lang="uk-UA" sz="1700" dirty="0">
                 <a:solidFill>
                   <a:srgbClr val="2A2018"/>
                 </a:solidFill>
@@ -15256,7 +15471,7 @@
               </a:rPr>
               <a:t>Спроєктувати архітектуру програмної системи</a:t>
             </a:r>
-            <a:endParaRPr sz="1700">
+            <a:endParaRPr sz="1700" dirty="0">
               <a:solidFill>
                 <a:srgbClr val="2A2018"/>
               </a:solidFill>
@@ -15285,7 +15500,7 @@
               <a:buChar char="-"/>
             </a:pPr>
             <a:r>
-              <a:rPr lang="uk-UA" sz="1700">
+              <a:rPr lang="uk-UA" sz="1700" dirty="0">
                 <a:solidFill>
                   <a:srgbClr val="2A2018"/>
                 </a:solidFill>
@@ -15294,9 +15509,33 @@
                 <a:cs typeface="Times New Roman"/>
                 <a:sym typeface="Times New Roman"/>
               </a:rPr>
-              <a:t>Реалізувати прототип на Unity та провести тестування балансу</a:t>
-            </a:r>
-            <a:endParaRPr sz="1700">
+              <a:t>Реалізувати прототип на </a:t>
+            </a:r>
+            <a:r>
+              <a:rPr lang="uk-UA" sz="1700" dirty="0" err="1">
+                <a:solidFill>
+                  <a:srgbClr val="2A2018"/>
+                </a:solidFill>
+                <a:latin typeface="Times New Roman"/>
+                <a:ea typeface="Times New Roman"/>
+                <a:cs typeface="Times New Roman"/>
+                <a:sym typeface="Times New Roman"/>
+              </a:rPr>
+              <a:t>Unity</a:t>
+            </a:r>
+            <a:r>
+              <a:rPr lang="uk-UA" sz="1700" dirty="0">
+                <a:solidFill>
+                  <a:srgbClr val="2A2018"/>
+                </a:solidFill>
+                <a:latin typeface="Times New Roman"/>
+                <a:ea typeface="Times New Roman"/>
+                <a:cs typeface="Times New Roman"/>
+                <a:sym typeface="Times New Roman"/>
+              </a:rPr>
+              <a:t> та провести тестування балансу</a:t>
+            </a:r>
+            <a:endParaRPr sz="1700" dirty="0">
               <a:solidFill>
                 <a:srgbClr val="2A2018"/>
               </a:solidFill>
@@ -15320,7 +15559,7 @@
               <a:buSzPts val="2118"/>
               <a:buNone/>
             </a:pPr>
-            <a:endParaRPr/>
+            <a:endParaRPr dirty="0"/>
           </a:p>
         </p:txBody>
       </p:sp>
@@ -15946,15 +16185,105 @@
               <a:buNone/>
             </a:pPr>
             <a:r>
-              <a:rPr lang="uk-UA">
+              <a:rPr lang="uk-UA" dirty="0">
                 <a:latin typeface="Times New Roman"/>
                 <a:ea typeface="Times New Roman"/>
                 <a:cs typeface="Times New Roman"/>
                 <a:sym typeface="Times New Roman"/>
               </a:rPr>
-              <a:t>Підхід:  компонентна архітектура Unity (MonoBehaviour) у поєднанні з подієво-орієнтованим ядром Simulation/Event для розв'язання залежностей між підсистемами.</a:t>
-            </a:r>
-            <a:endParaRPr>
+              <a:t>Підхід:  компонентна архітектура </a:t>
+            </a:r>
+            <a:r>
+              <a:rPr lang="uk-UA" dirty="0" err="1">
+                <a:latin typeface="Times New Roman"/>
+                <a:ea typeface="Times New Roman"/>
+                <a:cs typeface="Times New Roman"/>
+                <a:sym typeface="Times New Roman"/>
+              </a:rPr>
+              <a:t>Unity</a:t>
+            </a:r>
+            <a:r>
+              <a:rPr lang="uk-UA" dirty="0">
+                <a:latin typeface="Times New Roman"/>
+                <a:ea typeface="Times New Roman"/>
+                <a:cs typeface="Times New Roman"/>
+                <a:sym typeface="Times New Roman"/>
+              </a:rPr>
+              <a:t> (</a:t>
+            </a:r>
+            <a:r>
+              <a:rPr lang="uk-UA" dirty="0" err="1">
+                <a:latin typeface="Times New Roman"/>
+                <a:ea typeface="Times New Roman"/>
+                <a:cs typeface="Times New Roman"/>
+                <a:sym typeface="Times New Roman"/>
+              </a:rPr>
+              <a:t>MonoBehaviour</a:t>
+            </a:r>
+            <a:r>
+              <a:rPr lang="uk-UA" dirty="0">
+                <a:latin typeface="Times New Roman"/>
+                <a:ea typeface="Times New Roman"/>
+                <a:cs typeface="Times New Roman"/>
+                <a:sym typeface="Times New Roman"/>
+              </a:rPr>
+              <a:t>) у поєднанні з </a:t>
+            </a:r>
+            <a:r>
+              <a:rPr lang="uk-UA" dirty="0" err="1">
+                <a:latin typeface="Times New Roman"/>
+                <a:ea typeface="Times New Roman"/>
+                <a:cs typeface="Times New Roman"/>
+                <a:sym typeface="Times New Roman"/>
+              </a:rPr>
+              <a:t>подієво</a:t>
+            </a:r>
+            <a:r>
+              <a:rPr lang="uk-UA" dirty="0">
+                <a:latin typeface="Times New Roman"/>
+                <a:ea typeface="Times New Roman"/>
+                <a:cs typeface="Times New Roman"/>
+                <a:sym typeface="Times New Roman"/>
+              </a:rPr>
+              <a:t>-орієнтованим ядром </a:t>
+            </a:r>
+            <a:r>
+              <a:rPr lang="uk-UA" dirty="0" err="1">
+                <a:latin typeface="Times New Roman"/>
+                <a:ea typeface="Times New Roman"/>
+                <a:cs typeface="Times New Roman"/>
+                <a:sym typeface="Times New Roman"/>
+              </a:rPr>
+              <a:t>Simulation</a:t>
+            </a:r>
+            <a:r>
+              <a:rPr lang="uk-UA" dirty="0">
+                <a:latin typeface="Times New Roman"/>
+                <a:ea typeface="Times New Roman"/>
+                <a:cs typeface="Times New Roman"/>
+                <a:sym typeface="Times New Roman"/>
+              </a:rPr>
+              <a:t>/</a:t>
+            </a:r>
+            <a:r>
+              <a:rPr lang="uk-UA" dirty="0" err="1">
+                <a:latin typeface="Times New Roman"/>
+                <a:ea typeface="Times New Roman"/>
+                <a:cs typeface="Times New Roman"/>
+                <a:sym typeface="Times New Roman"/>
+              </a:rPr>
+              <a:t>Event</a:t>
+            </a:r>
+            <a:r>
+              <a:rPr lang="uk-UA" dirty="0">
+                <a:latin typeface="Times New Roman"/>
+                <a:ea typeface="Times New Roman"/>
+                <a:cs typeface="Times New Roman"/>
+                <a:sym typeface="Times New Roman"/>
+              </a:rPr>
+              <a:t> для розв'язання залежностей між підсистемами.</a:t>
+            </a:r>
+            <a:endParaRPr dirty="0">
               <a:latin typeface="Times New Roman"/>
               <a:ea typeface="Times New Roman"/>
               <a:cs typeface="Times New Roman"/>
@@ -15974,7 +16303,7 @@
               </a:spcAft>
               <a:buNone/>
             </a:pPr>
-            <a:endParaRPr>
+            <a:endParaRPr dirty="0">
               <a:latin typeface="Times New Roman"/>
               <a:ea typeface="Times New Roman"/>
               <a:cs typeface="Times New Roman"/>
@@ -15997,15 +16326,96 @@
               <a:buChar char="-"/>
             </a:pPr>
             <a:r>
-              <a:rPr lang="uk-UA">
+              <a:rPr lang="uk-UA" dirty="0" err="1">
                 <a:latin typeface="Times New Roman"/>
                 <a:ea typeface="Times New Roman"/>
                 <a:cs typeface="Times New Roman"/>
                 <a:sym typeface="Times New Roman"/>
               </a:rPr>
-              <a:t>Simulation / Event — Подієве ядро: планування та виконання ігрових подій (PlayerDeath, EnemyDeath тощо)</a:t>
-            </a:r>
-            <a:endParaRPr>
+              <a:t>Simulation</a:t>
+            </a:r>
+            <a:r>
+              <a:rPr lang="uk-UA" dirty="0">
+                <a:latin typeface="Times New Roman"/>
+                <a:ea typeface="Times New Roman"/>
+                <a:cs typeface="Times New Roman"/>
+                <a:sym typeface="Times New Roman"/>
+              </a:rPr>
+              <a:t> / </a:t>
+            </a:r>
+            <a:r>
+              <a:rPr lang="uk-UA" dirty="0" err="1">
+                <a:latin typeface="Times New Roman"/>
+                <a:ea typeface="Times New Roman"/>
+                <a:cs typeface="Times New Roman"/>
+                <a:sym typeface="Times New Roman"/>
+              </a:rPr>
+              <a:t>Event</a:t>
+            </a:r>
+            <a:r>
+              <a:rPr lang="uk-UA" dirty="0">
+                <a:latin typeface="Times New Roman"/>
+                <a:ea typeface="Times New Roman"/>
+                <a:cs typeface="Times New Roman"/>
+                <a:sym typeface="Times New Roman"/>
+              </a:rPr>
+              <a:t> — </a:t>
+            </a:r>
+            <a:r>
+              <a:rPr lang="uk-UA" dirty="0" err="1">
+                <a:latin typeface="Times New Roman"/>
+                <a:ea typeface="Times New Roman"/>
+                <a:cs typeface="Times New Roman"/>
+                <a:sym typeface="Times New Roman"/>
+              </a:rPr>
+              <a:t>Подієве</a:t>
+            </a:r>
+            <a:r>
+              <a:rPr lang="uk-UA" dirty="0">
+                <a:latin typeface="Times New Roman"/>
+                <a:ea typeface="Times New Roman"/>
+                <a:cs typeface="Times New Roman"/>
+                <a:sym typeface="Times New Roman"/>
+              </a:rPr>
+              <a:t> ядро: планування та виконання ігрових подій (</a:t>
+            </a:r>
+            <a:r>
+              <a:rPr lang="uk-UA" dirty="0" err="1">
+                <a:latin typeface="Times New Roman"/>
+                <a:ea typeface="Times New Roman"/>
+                <a:cs typeface="Times New Roman"/>
+                <a:sym typeface="Times New Roman"/>
+              </a:rPr>
+              <a:t>PlayerDeath</a:t>
+            </a:r>
+            <a:r>
+              <a:rPr lang="uk-UA" dirty="0">
+                <a:latin typeface="Times New Roman"/>
+                <a:ea typeface="Times New Roman"/>
+                <a:cs typeface="Times New Roman"/>
+                <a:sym typeface="Times New Roman"/>
+              </a:rPr>
+              <a:t>, </a:t>
+            </a:r>
+            <a:r>
+              <a:rPr lang="uk-UA" dirty="0" err="1">
+                <a:latin typeface="Times New Roman"/>
+                <a:ea typeface="Times New Roman"/>
+                <a:cs typeface="Times New Roman"/>
+                <a:sym typeface="Times New Roman"/>
+              </a:rPr>
+              <a:t>EnemyDeath</a:t>
+            </a:r>
+            <a:r>
+              <a:rPr lang="uk-UA" dirty="0">
+                <a:latin typeface="Times New Roman"/>
+                <a:ea typeface="Times New Roman"/>
+                <a:cs typeface="Times New Roman"/>
+                <a:sym typeface="Times New Roman"/>
+              </a:rPr>
+              <a:t> тощо)</a:t>
+            </a:r>
+            <a:endParaRPr dirty="0">
               <a:latin typeface="Times New Roman"/>
               <a:ea typeface="Times New Roman"/>
               <a:cs typeface="Times New Roman"/>
@@ -16028,15 +16438,24 @@
               <a:buChar char="-"/>
             </a:pPr>
             <a:r>
-              <a:rPr lang="uk-UA">
+              <a:rPr lang="uk-UA" dirty="0" err="1">
                 <a:latin typeface="Times New Roman"/>
                 <a:ea typeface="Times New Roman"/>
                 <a:cs typeface="Times New Roman"/>
                 <a:sym typeface="Times New Roman"/>
               </a:rPr>
-              <a:t>KinematicObject — Базовий клас фізики руху для гравця та ворогів (кінематичний Rigidbody2D)</a:t>
-            </a:r>
-            <a:endParaRPr>
+              <a:t>KinematicObject</a:t>
+            </a:r>
+            <a:r>
+              <a:rPr lang="uk-UA" dirty="0">
+                <a:latin typeface="Times New Roman"/>
+                <a:ea typeface="Times New Roman"/>
+                <a:cs typeface="Times New Roman"/>
+                <a:sym typeface="Times New Roman"/>
+              </a:rPr>
+              <a:t> — Базовий клас фізики руху для гравця та ворогів (кінематичний Rigidbody2D)</a:t>
+            </a:r>
+            <a:endParaRPr dirty="0">
               <a:latin typeface="Times New Roman"/>
               <a:ea typeface="Times New Roman"/>
               <a:cs typeface="Times New Roman"/>
@@ -16059,15 +16478,24 @@
               <a:buChar char="-"/>
             </a:pPr>
             <a:r>
-              <a:rPr lang="uk-UA">
+              <a:rPr lang="uk-UA" dirty="0" err="1">
                 <a:latin typeface="Times New Roman"/>
                 <a:ea typeface="Times New Roman"/>
                 <a:cs typeface="Times New Roman"/>
                 <a:sym typeface="Times New Roman"/>
               </a:rPr>
-              <a:t>PlayerController — Введення гравця, машина станів стрибка, керування персонажем</a:t>
-            </a:r>
-            <a:endParaRPr>
+              <a:t>PlayerController</a:t>
+            </a:r>
+            <a:r>
+              <a:rPr lang="uk-UA" dirty="0">
+                <a:latin typeface="Times New Roman"/>
+                <a:ea typeface="Times New Roman"/>
+                <a:cs typeface="Times New Roman"/>
+                <a:sym typeface="Times New Roman"/>
+              </a:rPr>
+              <a:t> — Введення гравця, машина станів стрибка, керування персонажем</a:t>
+            </a:r>
+            <a:endParaRPr dirty="0">
               <a:latin typeface="Times New Roman"/>
               <a:ea typeface="Times New Roman"/>
               <a:cs typeface="Times New Roman"/>
@@ -16090,15 +16518,78 @@
               <a:buChar char="-"/>
             </a:pPr>
             <a:r>
-              <a:rPr lang="uk-UA">
+              <a:rPr lang="uk-UA" dirty="0" err="1">
                 <a:latin typeface="Times New Roman"/>
                 <a:ea typeface="Times New Roman"/>
                 <a:cs typeface="Times New Roman"/>
                 <a:sym typeface="Times New Roman"/>
               </a:rPr>
-              <a:t>BlockSpawner / FallingBlock / BlockPool — Унікальна система магічних цеглин: спавн, фізика падіння, зважений вибір типу</a:t>
-            </a:r>
-            <a:endParaRPr>
+              <a:t>BlockSpawner</a:t>
+            </a:r>
+            <a:r>
+              <a:rPr lang="uk-UA" dirty="0">
+                <a:latin typeface="Times New Roman"/>
+                <a:ea typeface="Times New Roman"/>
+                <a:cs typeface="Times New Roman"/>
+                <a:sym typeface="Times New Roman"/>
+              </a:rPr>
+              <a:t> / </a:t>
+            </a:r>
+            <a:r>
+              <a:rPr lang="uk-UA" dirty="0" err="1">
+                <a:latin typeface="Times New Roman"/>
+                <a:ea typeface="Times New Roman"/>
+                <a:cs typeface="Times New Roman"/>
+                <a:sym typeface="Times New Roman"/>
+              </a:rPr>
+              <a:t>FallingBlock</a:t>
+            </a:r>
+            <a:r>
+              <a:rPr lang="uk-UA" dirty="0">
+                <a:latin typeface="Times New Roman"/>
+                <a:ea typeface="Times New Roman"/>
+                <a:cs typeface="Times New Roman"/>
+                <a:sym typeface="Times New Roman"/>
+              </a:rPr>
+              <a:t> / </a:t>
+            </a:r>
+            <a:r>
+              <a:rPr lang="uk-UA" dirty="0" err="1">
+                <a:latin typeface="Times New Roman"/>
+                <a:ea typeface="Times New Roman"/>
+                <a:cs typeface="Times New Roman"/>
+                <a:sym typeface="Times New Roman"/>
+              </a:rPr>
+              <a:t>BlockPool</a:t>
+            </a:r>
+            <a:r>
+              <a:rPr lang="uk-UA" dirty="0">
+                <a:latin typeface="Times New Roman"/>
+                <a:ea typeface="Times New Roman"/>
+                <a:cs typeface="Times New Roman"/>
+                <a:sym typeface="Times New Roman"/>
+              </a:rPr>
+              <a:t> — Унікальна система магічних цеглин: </a:t>
+            </a:r>
+            <a:r>
+              <a:rPr lang="uk-UA" dirty="0" err="1">
+                <a:latin typeface="Times New Roman"/>
+                <a:ea typeface="Times New Roman"/>
+                <a:cs typeface="Times New Roman"/>
+                <a:sym typeface="Times New Roman"/>
+              </a:rPr>
+              <a:t>спавн</a:t>
+            </a:r>
+            <a:r>
+              <a:rPr lang="uk-UA" dirty="0">
+                <a:latin typeface="Times New Roman"/>
+                <a:ea typeface="Times New Roman"/>
+                <a:cs typeface="Times New Roman"/>
+                <a:sym typeface="Times New Roman"/>
+              </a:rPr>
+              <a:t>, фізика падіння, зважений вибір типу</a:t>
+            </a:r>
+            <a:endParaRPr dirty="0">
               <a:latin typeface="Times New Roman"/>
               <a:ea typeface="Times New Roman"/>
               <a:cs typeface="Times New Roman"/>
@@ -16121,15 +16612,42 @@
               <a:buChar char="-"/>
             </a:pPr>
             <a:r>
-              <a:rPr lang="uk-UA">
+              <a:rPr lang="uk-UA" dirty="0" err="1">
                 <a:latin typeface="Times New Roman"/>
                 <a:ea typeface="Times New Roman"/>
                 <a:cs typeface="Times New Roman"/>
                 <a:sym typeface="Times New Roman"/>
               </a:rPr>
-              <a:t>EnemyController / PatrolPath — Поведінка та маршрути патрулювання ворогів</a:t>
-            </a:r>
-            <a:endParaRPr>
+              <a:t>EnemyController</a:t>
+            </a:r>
+            <a:r>
+              <a:rPr lang="uk-UA" dirty="0">
+                <a:latin typeface="Times New Roman"/>
+                <a:ea typeface="Times New Roman"/>
+                <a:cs typeface="Times New Roman"/>
+                <a:sym typeface="Times New Roman"/>
+              </a:rPr>
+              <a:t> / </a:t>
+            </a:r>
+            <a:r>
+              <a:rPr lang="uk-UA" dirty="0" err="1">
+                <a:latin typeface="Times New Roman"/>
+                <a:ea typeface="Times New Roman"/>
+                <a:cs typeface="Times New Roman"/>
+                <a:sym typeface="Times New Roman"/>
+              </a:rPr>
+              <a:t>PatrolPath</a:t>
+            </a:r>
+            <a:r>
+              <a:rPr lang="uk-UA" dirty="0">
+                <a:latin typeface="Times New Roman"/>
+                <a:ea typeface="Times New Roman"/>
+                <a:cs typeface="Times New Roman"/>
+                <a:sym typeface="Times New Roman"/>
+              </a:rPr>
+              <a:t> — Поведінка та маршрути патрулювання ворогів</a:t>
+            </a:r>
+            <a:endParaRPr dirty="0">
               <a:latin typeface="Times New Roman"/>
               <a:ea typeface="Times New Roman"/>
               <a:cs typeface="Times New Roman"/>
@@ -16152,15 +16670,42 @@
               <a:buChar char="-"/>
             </a:pPr>
             <a:r>
-              <a:rPr lang="uk-UA">
+              <a:rPr lang="uk-UA" dirty="0" err="1">
                 <a:latin typeface="Times New Roman"/>
                 <a:ea typeface="Times New Roman"/>
                 <a:cs typeface="Times New Roman"/>
                 <a:sym typeface="Times New Roman"/>
               </a:rPr>
-              <a:t>MainMenuController / LevelSelectController — Навігація меню, вибір рівня, перемикання сцен</a:t>
-            </a:r>
-            <a:endParaRPr>
+              <a:t>MainMenuController</a:t>
+            </a:r>
+            <a:r>
+              <a:rPr lang="uk-UA" dirty="0">
+                <a:latin typeface="Times New Roman"/>
+                <a:ea typeface="Times New Roman"/>
+                <a:cs typeface="Times New Roman"/>
+                <a:sym typeface="Times New Roman"/>
+              </a:rPr>
+              <a:t> / </a:t>
+            </a:r>
+            <a:r>
+              <a:rPr lang="uk-UA" dirty="0" err="1">
+                <a:latin typeface="Times New Roman"/>
+                <a:ea typeface="Times New Roman"/>
+                <a:cs typeface="Times New Roman"/>
+                <a:sym typeface="Times New Roman"/>
+              </a:rPr>
+              <a:t>LevelSelectController</a:t>
+            </a:r>
+            <a:r>
+              <a:rPr lang="uk-UA" dirty="0">
+                <a:latin typeface="Times New Roman"/>
+                <a:ea typeface="Times New Roman"/>
+                <a:cs typeface="Times New Roman"/>
+                <a:sym typeface="Times New Roman"/>
+              </a:rPr>
+              <a:t> — Навігація меню, вибір рівня, перемикання сцен</a:t>
+            </a:r>
+            <a:endParaRPr dirty="0">
               <a:latin typeface="Times New Roman"/>
               <a:ea typeface="Times New Roman"/>
               <a:cs typeface="Times New Roman"/>
@@ -16181,7 +16726,7 @@
               <a:buSzPct val="129032"/>
               <a:buNone/>
             </a:pPr>
-            <a:endParaRPr>
+            <a:endParaRPr dirty="0">
               <a:latin typeface="Economica"/>
               <a:ea typeface="Economica"/>
               <a:cs typeface="Economica"/>
@@ -16332,34 +16877,21 @@
           </a:bodyPr>
           <a:lstStyle/>
           <a:p>
-            <a:pPr marL="0" lvl="0" indent="0" algn="l" rtl="0">
-              <a:lnSpc>
-                <a:spcPct val="100000"/>
-              </a:lnSpc>
-              <a:spcBef>
-                <a:spcPts val="0"/>
-              </a:spcBef>
-              <a:spcAft>
-                <a:spcPts val="0"/>
-              </a:spcAft>
-              <a:buSzPts val="4200"/>
-              <a:buNone/>
+            <a:pPr marL="457200" lvl="0" indent="-342900">
+              <a:lnSpc>
+                <a:spcPct val="115000"/>
+              </a:lnSpc>
+              <a:buSzPct val="142857"/>
             </a:pPr>
             <a:r>
-              <a:rPr lang="uk-UA" sz="3200">
+              <a:rPr lang="uk-UA" sz="3200" dirty="0">
                 <a:latin typeface="Times New Roman"/>
                 <a:ea typeface="Times New Roman"/>
                 <a:cs typeface="Times New Roman"/>
                 <a:sym typeface="Times New Roman"/>
               </a:rPr>
-              <a:t>Опис програмного забезпечення, що було використано у дослідженні</a:t>
-            </a:r>
-            <a:endParaRPr sz="3200" dirty="0">
-              <a:latin typeface="Times New Roman"/>
-              <a:ea typeface="Times New Roman"/>
-              <a:cs typeface="Times New Roman"/>
-              <a:sym typeface="Times New Roman"/>
-            </a:endParaRPr>
+              <a:t>Етапи розробки</a:t>
+            </a:r>
           </a:p>
         </p:txBody>
       </p:sp>
@@ -16388,7 +16920,7 @@
         </p:spPr>
         <p:txBody>
           <a:bodyPr spcFirstLastPara="1" wrap="square" lIns="91425" tIns="91425" rIns="91425" bIns="91425" anchor="t" anchorCtr="0">
-            <a:normAutofit fontScale="77500" lnSpcReduction="20000"/>
+            <a:normAutofit/>
           </a:bodyPr>
           <a:lstStyle/>
           <a:p>
@@ -16405,15 +16937,6 @@
               <a:buSzPct val="142857"/>
               <a:buNone/>
             </a:pPr>
-            <a:r>
-              <a:rPr lang="uk-UA" dirty="0">
-                <a:latin typeface="Times New Roman"/>
-                <a:ea typeface="Times New Roman"/>
-                <a:cs typeface="Times New Roman"/>
-                <a:sym typeface="Times New Roman"/>
-              </a:rPr>
-              <a:t>Етапи розробки</a:t>
-            </a:r>
             <a:endParaRPr dirty="0">
               <a:latin typeface="Times New Roman"/>
               <a:ea typeface="Times New Roman"/>
@@ -16671,388 +17194,6 @@
               <a:ea typeface="Times New Roman"/>
               <a:cs typeface="Times New Roman"/>
               <a:sym typeface="Times New Roman"/>
-            </a:endParaRPr>
-          </a:p>
-          <a:p>
-            <a:pPr marL="457200" lvl="0" indent="-342900" algn="l" rtl="0">
-              <a:lnSpc>
-                <a:spcPct val="115000"/>
-              </a:lnSpc>
-              <a:spcBef>
-                <a:spcPts val="0"/>
-              </a:spcBef>
-              <a:spcAft>
-                <a:spcPts val="0"/>
-              </a:spcAft>
-              <a:buSzPct val="142857"/>
-              <a:buNone/>
-            </a:pPr>
-            <a:r>
-              <a:rPr lang="uk-UA" dirty="0">
-                <a:latin typeface="Times New Roman"/>
-                <a:ea typeface="Times New Roman"/>
-                <a:cs typeface="Times New Roman"/>
-                <a:sym typeface="Times New Roman"/>
-              </a:rPr>
-              <a:t>Використане програмне забезпечення</a:t>
-            </a:r>
-            <a:endParaRPr dirty="0">
-              <a:latin typeface="Times New Roman"/>
-              <a:ea typeface="Times New Roman"/>
-              <a:cs typeface="Times New Roman"/>
-              <a:sym typeface="Times New Roman"/>
-            </a:endParaRPr>
-          </a:p>
-          <a:p>
-            <a:pPr marL="457200" lvl="0" indent="-317183" algn="l" rtl="0">
-              <a:lnSpc>
-                <a:spcPct val="115000"/>
-              </a:lnSpc>
-              <a:spcBef>
-                <a:spcPts val="0"/>
-              </a:spcBef>
-              <a:spcAft>
-                <a:spcPts val="0"/>
-              </a:spcAft>
-              <a:buSzPct val="100000"/>
-              <a:buFont typeface="Times New Roman"/>
-              <a:buChar char="-"/>
-            </a:pPr>
-            <a:r>
-              <a:rPr lang="uk-UA" dirty="0" err="1">
-                <a:latin typeface="Times New Roman"/>
-                <a:ea typeface="Times New Roman"/>
-                <a:cs typeface="Times New Roman"/>
-                <a:sym typeface="Times New Roman"/>
-              </a:rPr>
-              <a:t>Unity</a:t>
-            </a:r>
-            <a:r>
-              <a:rPr lang="uk-UA" dirty="0">
-                <a:latin typeface="Times New Roman"/>
-                <a:ea typeface="Times New Roman"/>
-                <a:cs typeface="Times New Roman"/>
-                <a:sym typeface="Times New Roman"/>
-              </a:rPr>
-              <a:t> 6000.2 (URP) — редактор та рушій гри</a:t>
-            </a:r>
-            <a:endParaRPr dirty="0">
-              <a:latin typeface="Times New Roman"/>
-              <a:ea typeface="Times New Roman"/>
-              <a:cs typeface="Times New Roman"/>
-              <a:sym typeface="Times New Roman"/>
-            </a:endParaRPr>
-          </a:p>
-          <a:p>
-            <a:pPr marL="457200" lvl="0" indent="-317183" algn="l" rtl="0">
-              <a:lnSpc>
-                <a:spcPct val="115000"/>
-              </a:lnSpc>
-              <a:spcBef>
-                <a:spcPts val="0"/>
-              </a:spcBef>
-              <a:spcAft>
-                <a:spcPts val="0"/>
-              </a:spcAft>
-              <a:buSzPct val="100000"/>
-              <a:buFont typeface="Times New Roman"/>
-              <a:buChar char="-"/>
-            </a:pPr>
-            <a:r>
-              <a:rPr lang="uk-UA" dirty="0" err="1">
-                <a:latin typeface="Times New Roman"/>
-                <a:ea typeface="Times New Roman"/>
-                <a:cs typeface="Times New Roman"/>
-                <a:sym typeface="Times New Roman"/>
-              </a:rPr>
-              <a:t>Visual</a:t>
-            </a:r>
-            <a:r>
-              <a:rPr lang="uk-UA" dirty="0">
-                <a:latin typeface="Times New Roman"/>
-                <a:ea typeface="Times New Roman"/>
-                <a:cs typeface="Times New Roman"/>
-                <a:sym typeface="Times New Roman"/>
-              </a:rPr>
-              <a:t> </a:t>
-            </a:r>
-            <a:r>
-              <a:rPr lang="uk-UA" dirty="0" err="1">
-                <a:latin typeface="Times New Roman"/>
-                <a:ea typeface="Times New Roman"/>
-                <a:cs typeface="Times New Roman"/>
-                <a:sym typeface="Times New Roman"/>
-              </a:rPr>
-              <a:t>Studio</a:t>
-            </a:r>
-            <a:r>
-              <a:rPr lang="uk-UA" dirty="0">
-                <a:latin typeface="Times New Roman"/>
-                <a:ea typeface="Times New Roman"/>
-                <a:cs typeface="Times New Roman"/>
-                <a:sym typeface="Times New Roman"/>
-              </a:rPr>
-              <a:t> — середовище написання C#-коду</a:t>
-            </a:r>
-            <a:endParaRPr dirty="0">
-              <a:latin typeface="Times New Roman"/>
-              <a:ea typeface="Times New Roman"/>
-              <a:cs typeface="Times New Roman"/>
-              <a:sym typeface="Times New Roman"/>
-            </a:endParaRPr>
-          </a:p>
-          <a:p>
-            <a:pPr marL="457200" lvl="0" indent="-317183" algn="l" rtl="0">
-              <a:lnSpc>
-                <a:spcPct val="115000"/>
-              </a:lnSpc>
-              <a:spcBef>
-                <a:spcPts val="0"/>
-              </a:spcBef>
-              <a:spcAft>
-                <a:spcPts val="0"/>
-              </a:spcAft>
-              <a:buSzPct val="100000"/>
-              <a:buFont typeface="Times New Roman"/>
-              <a:buChar char="-"/>
-            </a:pPr>
-            <a:r>
-              <a:rPr lang="uk-UA" dirty="0" err="1">
-                <a:latin typeface="Times New Roman"/>
-                <a:ea typeface="Times New Roman"/>
-                <a:cs typeface="Times New Roman"/>
-                <a:sym typeface="Times New Roman"/>
-              </a:rPr>
-              <a:t>Unity</a:t>
-            </a:r>
-            <a:r>
-              <a:rPr lang="uk-UA" dirty="0">
-                <a:latin typeface="Times New Roman"/>
-                <a:ea typeface="Times New Roman"/>
-                <a:cs typeface="Times New Roman"/>
-                <a:sym typeface="Times New Roman"/>
-              </a:rPr>
-              <a:t> </a:t>
-            </a:r>
-            <a:r>
-              <a:rPr lang="uk-UA" dirty="0" err="1">
-                <a:latin typeface="Times New Roman"/>
-                <a:ea typeface="Times New Roman"/>
-                <a:cs typeface="Times New Roman"/>
-                <a:sym typeface="Times New Roman"/>
-              </a:rPr>
-              <a:t>Input</a:t>
-            </a:r>
-            <a:r>
-              <a:rPr lang="uk-UA" dirty="0">
-                <a:latin typeface="Times New Roman"/>
-                <a:ea typeface="Times New Roman"/>
-                <a:cs typeface="Times New Roman"/>
-                <a:sym typeface="Times New Roman"/>
-              </a:rPr>
-              <a:t> </a:t>
-            </a:r>
-            <a:r>
-              <a:rPr lang="uk-UA" dirty="0" err="1">
-                <a:latin typeface="Times New Roman"/>
-                <a:ea typeface="Times New Roman"/>
-                <a:cs typeface="Times New Roman"/>
-                <a:sym typeface="Times New Roman"/>
-              </a:rPr>
-              <a:t>System</a:t>
-            </a:r>
-            <a:r>
-              <a:rPr lang="uk-UA" dirty="0">
-                <a:latin typeface="Times New Roman"/>
-                <a:ea typeface="Times New Roman"/>
-                <a:cs typeface="Times New Roman"/>
-                <a:sym typeface="Times New Roman"/>
-              </a:rPr>
-              <a:t> — обробка введення гравця</a:t>
-            </a:r>
-            <a:endParaRPr dirty="0">
-              <a:latin typeface="Times New Roman"/>
-              <a:ea typeface="Times New Roman"/>
-              <a:cs typeface="Times New Roman"/>
-              <a:sym typeface="Times New Roman"/>
-            </a:endParaRPr>
-          </a:p>
-          <a:p>
-            <a:pPr marL="457200" lvl="0" indent="-317183" algn="l" rtl="0">
-              <a:lnSpc>
-                <a:spcPct val="115000"/>
-              </a:lnSpc>
-              <a:spcBef>
-                <a:spcPts val="0"/>
-              </a:spcBef>
-              <a:spcAft>
-                <a:spcPts val="0"/>
-              </a:spcAft>
-              <a:buSzPct val="100000"/>
-              <a:buFont typeface="Times New Roman"/>
-              <a:buChar char="-"/>
-            </a:pPr>
-            <a:r>
-              <a:rPr lang="uk-UA" dirty="0" err="1">
-                <a:latin typeface="Times New Roman"/>
-                <a:ea typeface="Times New Roman"/>
-                <a:cs typeface="Times New Roman"/>
-                <a:sym typeface="Times New Roman"/>
-              </a:rPr>
-              <a:t>Git</a:t>
-            </a:r>
-            <a:r>
-              <a:rPr lang="uk-UA" dirty="0">
-                <a:latin typeface="Times New Roman"/>
-                <a:ea typeface="Times New Roman"/>
-                <a:cs typeface="Times New Roman"/>
-                <a:sym typeface="Times New Roman"/>
-              </a:rPr>
-              <a:t> / </a:t>
-            </a:r>
-            <a:r>
-              <a:rPr lang="uk-UA" dirty="0" err="1">
-                <a:latin typeface="Times New Roman"/>
-                <a:ea typeface="Times New Roman"/>
-                <a:cs typeface="Times New Roman"/>
-                <a:sym typeface="Times New Roman"/>
-              </a:rPr>
-              <a:t>GitHub</a:t>
-            </a:r>
-            <a:r>
-              <a:rPr lang="uk-UA" dirty="0">
-                <a:latin typeface="Times New Roman"/>
-                <a:ea typeface="Times New Roman"/>
-                <a:cs typeface="Times New Roman"/>
-                <a:sym typeface="Times New Roman"/>
-              </a:rPr>
-              <a:t> — контроль версій проєкту</a:t>
-            </a:r>
-            <a:endParaRPr dirty="0">
-              <a:latin typeface="Times New Roman"/>
-              <a:ea typeface="Times New Roman"/>
-              <a:cs typeface="Times New Roman"/>
-              <a:sym typeface="Times New Roman"/>
-            </a:endParaRPr>
-          </a:p>
-          <a:p>
-            <a:pPr marL="457200" lvl="0" indent="-342900" algn="l" rtl="0">
-              <a:lnSpc>
-                <a:spcPct val="115000"/>
-              </a:lnSpc>
-              <a:spcBef>
-                <a:spcPts val="0"/>
-              </a:spcBef>
-              <a:spcAft>
-                <a:spcPts val="0"/>
-              </a:spcAft>
-              <a:buSzPct val="142857"/>
-              <a:buNone/>
-            </a:pPr>
-            <a:endParaRPr dirty="0">
-              <a:latin typeface="Times New Roman"/>
-              <a:ea typeface="Times New Roman"/>
-              <a:cs typeface="Times New Roman"/>
-              <a:sym typeface="Times New Roman"/>
-            </a:endParaRPr>
-          </a:p>
-          <a:p>
-            <a:pPr marL="457200" lvl="0" indent="-342900" algn="l" rtl="0">
-              <a:lnSpc>
-                <a:spcPct val="115000"/>
-              </a:lnSpc>
-              <a:spcBef>
-                <a:spcPts val="0"/>
-              </a:spcBef>
-              <a:spcAft>
-                <a:spcPts val="0"/>
-              </a:spcAft>
-              <a:buSzPct val="142857"/>
-              <a:buNone/>
-            </a:pPr>
-            <a:r>
-              <a:rPr lang="uk-UA" dirty="0">
-                <a:latin typeface="Times New Roman"/>
-                <a:ea typeface="Times New Roman"/>
-                <a:cs typeface="Times New Roman"/>
-                <a:sym typeface="Times New Roman"/>
-              </a:rPr>
-              <a:t>Мови та формати даних</a:t>
-            </a:r>
-            <a:endParaRPr dirty="0">
-              <a:latin typeface="Times New Roman"/>
-              <a:ea typeface="Times New Roman"/>
-              <a:cs typeface="Times New Roman"/>
-              <a:sym typeface="Times New Roman"/>
-            </a:endParaRPr>
-          </a:p>
-          <a:p>
-            <a:pPr marL="457200" lvl="0" indent="-342900" algn="l" rtl="0">
-              <a:lnSpc>
-                <a:spcPct val="115000"/>
-              </a:lnSpc>
-              <a:spcBef>
-                <a:spcPts val="0"/>
-              </a:spcBef>
-              <a:spcAft>
-                <a:spcPts val="0"/>
-              </a:spcAft>
-              <a:buSzPct val="142857"/>
-              <a:buNone/>
-            </a:pPr>
-            <a:r>
-              <a:rPr lang="uk-UA" dirty="0">
-                <a:latin typeface="Times New Roman"/>
-                <a:ea typeface="Times New Roman"/>
-                <a:cs typeface="Times New Roman"/>
-                <a:sym typeface="Times New Roman"/>
-              </a:rPr>
-              <a:t>C# — основна мова реалізації ігрової логіки</a:t>
-            </a:r>
-            <a:endParaRPr dirty="0">
-              <a:latin typeface="Times New Roman"/>
-              <a:ea typeface="Times New Roman"/>
-              <a:cs typeface="Times New Roman"/>
-              <a:sym typeface="Times New Roman"/>
-            </a:endParaRPr>
-          </a:p>
-          <a:p>
-            <a:pPr marL="457200" lvl="0" indent="-342900" algn="l" rtl="0">
-              <a:lnSpc>
-                <a:spcPct val="115000"/>
-              </a:lnSpc>
-              <a:spcBef>
-                <a:spcPts val="0"/>
-              </a:spcBef>
-              <a:spcAft>
-                <a:spcPts val="0"/>
-              </a:spcAft>
-              <a:buSzPct val="142857"/>
-              <a:buNone/>
-            </a:pPr>
-            <a:r>
-              <a:rPr lang="uk-UA" dirty="0" err="1">
-                <a:latin typeface="Times New Roman"/>
-                <a:ea typeface="Times New Roman"/>
-                <a:cs typeface="Times New Roman"/>
-                <a:sym typeface="Times New Roman"/>
-              </a:rPr>
-              <a:t>ScriptableObject</a:t>
-            </a:r>
-            <a:r>
-              <a:rPr lang="uk-UA" dirty="0">
-                <a:latin typeface="Times New Roman"/>
-                <a:ea typeface="Times New Roman"/>
-                <a:cs typeface="Times New Roman"/>
-                <a:sym typeface="Times New Roman"/>
-              </a:rPr>
-              <a:t> — конфігурація типів цеглин і рівнів через дані, без зміни коду</a:t>
-            </a:r>
-            <a:endParaRPr dirty="0">
-              <a:latin typeface="Economica"/>
-              <a:ea typeface="Economica"/>
-              <a:cs typeface="Economica"/>
-              <a:sym typeface="Economica"/>
             </a:endParaRPr>
           </a:p>
         </p:txBody>
